--- a/Bachelors Thesis/Figures.pptx
+++ b/Bachelors Thesis/Figures.pptx
@@ -9051,8 +9051,8 @@
           </p:nvSpPr>
           <p:spPr>
             <a:xfrm>
-              <a:off x="1628849" y="5827474"/>
-              <a:ext cx="1298448" cy="82296"/>
+              <a:off x="1629873" y="5827474"/>
+              <a:ext cx="1297423" cy="82296"/>
             </a:xfrm>
             <a:prstGeom prst="rect">
               <a:avLst/>
@@ -9299,8 +9299,8 @@
           </p:nvSpPr>
           <p:spPr>
             <a:xfrm>
-              <a:off x="1625622" y="5740270"/>
-              <a:ext cx="1290774" cy="86755"/>
+              <a:off x="1629872" y="5740270"/>
+              <a:ext cx="1286523" cy="86755"/>
             </a:xfrm>
             <a:prstGeom prst="rect">
               <a:avLst/>
@@ -9361,8 +9361,8 @@
           </p:nvSpPr>
           <p:spPr>
             <a:xfrm>
-              <a:off x="1631730" y="5579442"/>
-              <a:ext cx="1298448" cy="156096"/>
+              <a:off x="1628472" y="5581823"/>
+              <a:ext cx="1301706" cy="156096"/>
             </a:xfrm>
             <a:prstGeom prst="rect">
               <a:avLst/>
@@ -9671,8 +9671,8 @@
           </p:nvSpPr>
           <p:spPr>
             <a:xfrm>
-              <a:off x="1630863" y="5004277"/>
-              <a:ext cx="1302542" cy="161871"/>
+              <a:off x="1628472" y="5001896"/>
+              <a:ext cx="1304933" cy="161871"/>
             </a:xfrm>
             <a:prstGeom prst="rect">
               <a:avLst/>
@@ -9734,7 +9734,7 @@
           <p:spPr>
             <a:xfrm>
               <a:off x="1630862" y="4746054"/>
-              <a:ext cx="1292873" cy="253491"/>
+              <a:ext cx="1292873" cy="259847"/>
             </a:xfrm>
             <a:prstGeom prst="rect">
               <a:avLst/>
@@ -9776,7 +9776,7 @@
                   <a:latin typeface="Arial" panose="020B0604020202020204" pitchFamily="34" charset="0"/>
                   <a:cs typeface="Arial" panose="020B0604020202020204" pitchFamily="34" charset="0"/>
                 </a:rPr>
-                <a:t>Kisspeptins</a:t>
+                <a:t>Kisspeptin</a:t>
               </a:r>
             </a:p>
           </p:txBody>
@@ -9838,7 +9838,7 @@
                   <a:latin typeface="Arial" panose="020B0604020202020204" pitchFamily="34" charset="0"/>
                   <a:cs typeface="Arial" panose="020B0604020202020204" pitchFamily="34" charset="0"/>
                 </a:rPr>
-                <a:t>Tachykinins</a:t>
+                <a:t>Tachykinin</a:t>
               </a:r>
             </a:p>
           </p:txBody>
@@ -9857,8 +9857,8 @@
           </p:nvSpPr>
           <p:spPr>
             <a:xfrm>
-              <a:off x="1630859" y="4005994"/>
-              <a:ext cx="1302546" cy="338824"/>
+              <a:off x="1630859" y="4008272"/>
+              <a:ext cx="1302546" cy="331067"/>
             </a:xfrm>
             <a:prstGeom prst="rect">
               <a:avLst/>
@@ -10105,8 +10105,8 @@
           </p:nvSpPr>
           <p:spPr>
             <a:xfrm>
-              <a:off x="1629874" y="2777899"/>
-              <a:ext cx="1292873" cy="326579"/>
+              <a:off x="1632255" y="2784575"/>
+              <a:ext cx="1292873" cy="320594"/>
             </a:xfrm>
             <a:prstGeom prst="rect">
               <a:avLst/>
@@ -10148,7 +10148,7 @@
                   <a:latin typeface="Arial" panose="020B0604020202020204" pitchFamily="34" charset="0"/>
                   <a:cs typeface="Arial" panose="020B0604020202020204" pitchFamily="34" charset="0"/>
                 </a:rPr>
-                <a:t>Nonapeptides</a:t>
+                <a:t>Nonapeptide</a:t>
               </a:r>
             </a:p>
           </p:txBody>
@@ -10168,7 +10168,7 @@
           <p:spPr>
             <a:xfrm>
               <a:off x="1628472" y="2457732"/>
-              <a:ext cx="1293896" cy="333167"/>
+              <a:ext cx="1293896" cy="326363"/>
             </a:xfrm>
             <a:prstGeom prst="rect">
               <a:avLst/>
